--- a/ppt/6月23日实验结果.pptx
+++ b/ppt/6月23日实验结果.pptx
@@ -5,8 +5,9 @@
     <p:sldMasterId id="2147483648" r:id="rId1"/>
   </p:sldMasterIdLst>
   <p:sldIdLst>
-    <p:sldId id="256" r:id="rId2"/>
-    <p:sldId id="257" r:id="rId3"/>
+    <p:sldId id="257" r:id="rId2"/>
+    <p:sldId id="258" r:id="rId3"/>
+    <p:sldId id="259" r:id="rId4"/>
   </p:sldIdLst>
   <p:sldSz cx="12192000" cy="6858000"/>
   <p:notesSz cx="6858000" cy="9144000"/>
@@ -105,6 +106,11 @@
       </a:defRPr>
     </a:lvl9pPr>
   </p:defaultTextStyle>
+  <p:extLst>
+    <p:ext uri="{EFAFB233-063F-42B5-8137-9DF3F51BA10A}">
+      <p15:sldGuideLst xmlns:p15="http://schemas.microsoft.com/office/powerpoint/2012/main"/>
+    </p:ext>
+  </p:extLst>
 </p:presentation>
 </file>
 
@@ -255,7 +261,7 @@
           <a:p>
             <a:fld id="{E33C4DB6-C3E2-F540-9E82-A333834BD7F4}" type="datetimeFigureOut">
               <a:rPr kumimoji="1" lang="zh-CN" altLang="en-US" smtClean="0"/>
-              <a:t>2025/6/23</a:t>
+              <a:t>2025/7/8</a:t>
             </a:fld>
             <a:endParaRPr kumimoji="1" lang="zh-CN" altLang="en-US"/>
           </a:p>
@@ -453,7 +459,7 @@
           <a:p>
             <a:fld id="{E33C4DB6-C3E2-F540-9E82-A333834BD7F4}" type="datetimeFigureOut">
               <a:rPr kumimoji="1" lang="zh-CN" altLang="en-US" smtClean="0"/>
-              <a:t>2025/6/23</a:t>
+              <a:t>2025/7/8</a:t>
             </a:fld>
             <a:endParaRPr kumimoji="1" lang="zh-CN" altLang="en-US"/>
           </a:p>
@@ -661,7 +667,7 @@
           <a:p>
             <a:fld id="{E33C4DB6-C3E2-F540-9E82-A333834BD7F4}" type="datetimeFigureOut">
               <a:rPr kumimoji="1" lang="zh-CN" altLang="en-US" smtClean="0"/>
-              <a:t>2025/6/23</a:t>
+              <a:t>2025/7/8</a:t>
             </a:fld>
             <a:endParaRPr kumimoji="1" lang="zh-CN" altLang="en-US"/>
           </a:p>
@@ -859,7 +865,7 @@
           <a:p>
             <a:fld id="{E33C4DB6-C3E2-F540-9E82-A333834BD7F4}" type="datetimeFigureOut">
               <a:rPr kumimoji="1" lang="zh-CN" altLang="en-US" smtClean="0"/>
-              <a:t>2025/6/23</a:t>
+              <a:t>2025/7/8</a:t>
             </a:fld>
             <a:endParaRPr kumimoji="1" lang="zh-CN" altLang="en-US"/>
           </a:p>
@@ -1134,7 +1140,7 @@
           <a:p>
             <a:fld id="{E33C4DB6-C3E2-F540-9E82-A333834BD7F4}" type="datetimeFigureOut">
               <a:rPr kumimoji="1" lang="zh-CN" altLang="en-US" smtClean="0"/>
-              <a:t>2025/6/23</a:t>
+              <a:t>2025/7/8</a:t>
             </a:fld>
             <a:endParaRPr kumimoji="1" lang="zh-CN" altLang="en-US"/>
           </a:p>
@@ -1399,7 +1405,7 @@
           <a:p>
             <a:fld id="{E33C4DB6-C3E2-F540-9E82-A333834BD7F4}" type="datetimeFigureOut">
               <a:rPr kumimoji="1" lang="zh-CN" altLang="en-US" smtClean="0"/>
-              <a:t>2025/6/23</a:t>
+              <a:t>2025/7/8</a:t>
             </a:fld>
             <a:endParaRPr kumimoji="1" lang="zh-CN" altLang="en-US"/>
           </a:p>
@@ -1811,7 +1817,7 @@
           <a:p>
             <a:fld id="{E33C4DB6-C3E2-F540-9E82-A333834BD7F4}" type="datetimeFigureOut">
               <a:rPr kumimoji="1" lang="zh-CN" altLang="en-US" smtClean="0"/>
-              <a:t>2025/6/23</a:t>
+              <a:t>2025/7/8</a:t>
             </a:fld>
             <a:endParaRPr kumimoji="1" lang="zh-CN" altLang="en-US"/>
           </a:p>
@@ -1952,7 +1958,7 @@
           <a:p>
             <a:fld id="{E33C4DB6-C3E2-F540-9E82-A333834BD7F4}" type="datetimeFigureOut">
               <a:rPr kumimoji="1" lang="zh-CN" altLang="en-US" smtClean="0"/>
-              <a:t>2025/6/23</a:t>
+              <a:t>2025/7/8</a:t>
             </a:fld>
             <a:endParaRPr kumimoji="1" lang="zh-CN" altLang="en-US"/>
           </a:p>
@@ -2065,7 +2071,7 @@
           <a:p>
             <a:fld id="{E33C4DB6-C3E2-F540-9E82-A333834BD7F4}" type="datetimeFigureOut">
               <a:rPr kumimoji="1" lang="zh-CN" altLang="en-US" smtClean="0"/>
-              <a:t>2025/6/23</a:t>
+              <a:t>2025/7/8</a:t>
             </a:fld>
             <a:endParaRPr kumimoji="1" lang="zh-CN" altLang="en-US"/>
           </a:p>
@@ -2376,7 +2382,7 @@
           <a:p>
             <a:fld id="{E33C4DB6-C3E2-F540-9E82-A333834BD7F4}" type="datetimeFigureOut">
               <a:rPr kumimoji="1" lang="zh-CN" altLang="en-US" smtClean="0"/>
-              <a:t>2025/6/23</a:t>
+              <a:t>2025/7/8</a:t>
             </a:fld>
             <a:endParaRPr kumimoji="1" lang="zh-CN" altLang="en-US"/>
           </a:p>
@@ -2664,7 +2670,7 @@
           <a:p>
             <a:fld id="{E33C4DB6-C3E2-F540-9E82-A333834BD7F4}" type="datetimeFigureOut">
               <a:rPr kumimoji="1" lang="zh-CN" altLang="en-US" smtClean="0"/>
-              <a:t>2025/6/23</a:t>
+              <a:t>2025/7/8</a:t>
             </a:fld>
             <a:endParaRPr kumimoji="1" lang="zh-CN" altLang="en-US"/>
           </a:p>
@@ -2905,7 +2911,7 @@
           <a:p>
             <a:fld id="{E33C4DB6-C3E2-F540-9E82-A333834BD7F4}" type="datetimeFigureOut">
               <a:rPr kumimoji="1" lang="zh-CN" altLang="en-US" smtClean="0"/>
-              <a:t>2025/6/23</a:t>
+              <a:t>2025/7/8</a:t>
             </a:fld>
             <a:endParaRPr kumimoji="1" lang="zh-CN" altLang="en-US"/>
           </a:p>
@@ -3327,15 +3333,15 @@
           <p:cNvPr id="2" name="标题 1">
             <a:extLst>
               <a:ext uri="{FF2B5EF4-FFF2-40B4-BE49-F238E27FC236}">
-                <a16:creationId xmlns:a16="http://schemas.microsoft.com/office/drawing/2014/main" id="{EEACAA6A-8A06-1325-DC5B-63D88F7B1291}"/>
-              </a:ext>
-            </a:extLst>
-          </p:cNvPr>
-          <p:cNvSpPr>
-            <a:spLocks noGrp="1"/>
-          </p:cNvSpPr>
-          <p:nvPr>
-            <p:ph type="ctrTitle"/>
+                <a16:creationId xmlns:a16="http://schemas.microsoft.com/office/drawing/2014/main" id="{AAABF56D-561E-8EC4-662A-663A9057BB66}"/>
+              </a:ext>
+            </a:extLst>
+          </p:cNvPr>
+          <p:cNvSpPr>
+            <a:spLocks noGrp="1"/>
+          </p:cNvSpPr>
+          <p:nvPr>
+            <p:ph type="title"/>
           </p:nvPr>
         </p:nvSpPr>
         <p:spPr/>
@@ -3349,33 +3355,91 @@
       </p:sp>
       <p:sp>
         <p:nvSpPr>
-          <p:cNvPr id="3" name="副标题 2">
-            <a:extLst>
-              <a:ext uri="{FF2B5EF4-FFF2-40B4-BE49-F238E27FC236}">
-                <a16:creationId xmlns:a16="http://schemas.microsoft.com/office/drawing/2014/main" id="{998A0702-E715-6A20-DDB6-D3D0FAB339A5}"/>
-              </a:ext>
-            </a:extLst>
-          </p:cNvPr>
-          <p:cNvSpPr>
-            <a:spLocks noGrp="1"/>
-          </p:cNvSpPr>
-          <p:nvPr>
-            <p:ph type="subTitle" idx="1"/>
-          </p:nvPr>
-        </p:nvSpPr>
-        <p:spPr/>
+          <p:cNvPr id="3" name="内容占位符 2">
+            <a:extLst>
+              <a:ext uri="{FF2B5EF4-FFF2-40B4-BE49-F238E27FC236}">
+                <a16:creationId xmlns:a16="http://schemas.microsoft.com/office/drawing/2014/main" id="{95D020B9-670F-78D2-3213-CD71DC8D9BA8}"/>
+              </a:ext>
+            </a:extLst>
+          </p:cNvPr>
+          <p:cNvSpPr>
+            <a:spLocks noGrp="1"/>
+          </p:cNvSpPr>
+          <p:nvPr>
+            <p:ph idx="1"/>
+          </p:nvPr>
+        </p:nvSpPr>
+        <p:spPr>
+          <a:xfrm>
+            <a:off x="838199" y="1825625"/>
+            <a:ext cx="4659489" cy="4351338"/>
+          </a:xfrm>
+        </p:spPr>
         <p:txBody>
           <a:bodyPr/>
           <a:lstStyle/>
           <a:p>
-            <a:endParaRPr kumimoji="1" lang="zh-CN" altLang="en-US"/>
-          </a:p>
-        </p:txBody>
-      </p:sp>
+            <a:r>
+              <a:rPr kumimoji="1" lang="en-US" altLang="zh-CN" dirty="0"/>
+              <a:t>CAFEC</a:t>
+            </a:r>
+            <a:r>
+              <a:rPr kumimoji="1" lang="zh-CN" altLang="en-US" dirty="0"/>
+              <a:t>对比</a:t>
+            </a:r>
+            <a:r>
+              <a:rPr kumimoji="1" lang="en-US" altLang="zh-CN" dirty="0"/>
+              <a:t>FEC</a:t>
+            </a:r>
+            <a:r>
+              <a:rPr kumimoji="1" lang="zh-CN" altLang="en-US" dirty="0"/>
+              <a:t>有一个界限，在未超过这个界限时</a:t>
+            </a:r>
+            <a:r>
+              <a:rPr kumimoji="1" lang="en-US" altLang="zh-CN" dirty="0"/>
+              <a:t>CAFEC</a:t>
+            </a:r>
+            <a:r>
+              <a:rPr kumimoji="1" lang="zh-CN" altLang="en-US" dirty="0"/>
+              <a:t>效果不明显。当超过这个界限时效果明显</a:t>
+            </a:r>
+          </a:p>
+        </p:txBody>
+      </p:sp>
+      <p:pic>
+        <p:nvPicPr>
+          <p:cNvPr id="5" name="图片 4">
+            <a:extLst>
+              <a:ext uri="{FF2B5EF4-FFF2-40B4-BE49-F238E27FC236}">
+                <a16:creationId xmlns:a16="http://schemas.microsoft.com/office/drawing/2014/main" id="{5F96F842-200D-EC39-3AFB-234E97B1BCD9}"/>
+              </a:ext>
+            </a:extLst>
+          </p:cNvPr>
+          <p:cNvPicPr>
+            <a:picLocks noChangeAspect="1"/>
+          </p:cNvPicPr>
+          <p:nvPr/>
+        </p:nvPicPr>
+        <p:blipFill>
+          <a:blip r:embed="rId2"/>
+          <a:stretch>
+            <a:fillRect/>
+          </a:stretch>
+        </p:blipFill>
+        <p:spPr>
+          <a:xfrm>
+            <a:off x="5619530" y="1784049"/>
+            <a:ext cx="5971337" cy="4708826"/>
+          </a:xfrm>
+          <a:prstGeom prst="rect">
+            <a:avLst/>
+          </a:prstGeom>
+        </p:spPr>
+      </p:pic>
     </p:spTree>
     <p:extLst>
       <p:ext uri="{BB962C8B-B14F-4D97-AF65-F5344CB8AC3E}">
-        <p14:creationId xmlns:p14="http://schemas.microsoft.com/office/powerpoint/2010/main" val="3167941189"/>
+        <p14:creationId xmlns:p14="http://schemas.microsoft.com/office/powerpoint/2010/main" val="884742854"/>
       </p:ext>
     </p:extLst>
   </p:cSld>
@@ -3388,6 +3452,16 @@
 <file path=ppt/slides/slide2.xml><?xml version="1.0" encoding="utf-8"?>
 <p:sld xmlns:a="http://schemas.openxmlformats.org/drawingml/2006/main" xmlns:r="http://schemas.openxmlformats.org/officeDocument/2006/relationships" xmlns:p="http://schemas.openxmlformats.org/presentationml/2006/main">
   <p:cSld>
+    <p:bg>
+      <p:bgPr>
+        <a:solidFill>
+          <a:schemeClr val="bg1">
+            <a:alpha val="0"/>
+          </a:schemeClr>
+        </a:solidFill>
+        <a:effectLst/>
+      </p:bgPr>
+    </p:bg>
     <p:spTree>
       <p:nvGrpSpPr>
         <p:cNvPr id="1" name=""/>
@@ -3407,7 +3481,7 @@
           <p:cNvPr id="2" name="标题 1">
             <a:extLst>
               <a:ext uri="{FF2B5EF4-FFF2-40B4-BE49-F238E27FC236}">
-                <a16:creationId xmlns:a16="http://schemas.microsoft.com/office/drawing/2014/main" id="{AAABF56D-561E-8EC4-662A-663A9057BB66}"/>
+                <a16:creationId xmlns:a16="http://schemas.microsoft.com/office/drawing/2014/main" id="{63EC5BCF-6C85-15B6-6119-945103D4F0FC}"/>
               </a:ext>
             </a:extLst>
           </p:cNvPr>
@@ -3423,97 +3497,1440 @@
           <a:bodyPr/>
           <a:lstStyle/>
           <a:p>
-            <a:endParaRPr kumimoji="1" lang="zh-CN" altLang="en-US"/>
-          </a:p>
-        </p:txBody>
-      </p:sp>
-      <p:sp>
-        <p:nvSpPr>
-          <p:cNvPr id="3" name="内容占位符 2">
-            <a:extLst>
-              <a:ext uri="{FF2B5EF4-FFF2-40B4-BE49-F238E27FC236}">
-                <a16:creationId xmlns:a16="http://schemas.microsoft.com/office/drawing/2014/main" id="{95D020B9-670F-78D2-3213-CD71DC8D9BA8}"/>
-              </a:ext>
-            </a:extLst>
-          </p:cNvPr>
-          <p:cNvSpPr>
-            <a:spLocks noGrp="1"/>
-          </p:cNvSpPr>
-          <p:nvPr>
-            <p:ph idx="1"/>
-          </p:nvPr>
+            <a:endParaRPr kumimoji="1" lang="zh-CN" altLang="en-US" dirty="0"/>
+          </a:p>
+        </p:txBody>
+      </p:sp>
+      <p:sp>
+        <p:nvSpPr>
+          <p:cNvPr id="4" name="矩形 3">
+            <a:extLst>
+              <a:ext uri="{FF2B5EF4-FFF2-40B4-BE49-F238E27FC236}">
+                <a16:creationId xmlns:a16="http://schemas.microsoft.com/office/drawing/2014/main" id="{5B1B892A-33BB-E617-38B4-18BFF1B53012}"/>
+              </a:ext>
+            </a:extLst>
+          </p:cNvPr>
+          <p:cNvSpPr/>
+          <p:nvPr/>
         </p:nvSpPr>
         <p:spPr>
           <a:xfrm>
-            <a:off x="838199" y="1825625"/>
-            <a:ext cx="4659489" cy="4351338"/>
-          </a:xfrm>
-        </p:spPr>
-        <p:txBody>
-          <a:bodyPr/>
-          <a:lstStyle/>
-          <a:p>
-            <a:r>
-              <a:rPr kumimoji="1" lang="en-US" altLang="zh-CN" dirty="0"/>
-              <a:t>CAFEC</a:t>
-            </a:r>
-            <a:r>
-              <a:rPr kumimoji="1" lang="zh-CN" altLang="en-US" dirty="0"/>
-              <a:t>对比</a:t>
-            </a:r>
-            <a:r>
-              <a:rPr kumimoji="1" lang="en-US" altLang="zh-CN" dirty="0"/>
-              <a:t>FEC</a:t>
-            </a:r>
-            <a:r>
-              <a:rPr kumimoji="1" lang="zh-CN" altLang="en-US" dirty="0"/>
-              <a:t>有一个界限，在未超过这个界限时</a:t>
-            </a:r>
-            <a:r>
-              <a:rPr kumimoji="1" lang="en-US" altLang="zh-CN" dirty="0"/>
-              <a:t>CAFEC</a:t>
-            </a:r>
-            <a:r>
-              <a:rPr kumimoji="1" lang="zh-CN" altLang="en-US" dirty="0"/>
-              <a:t>效果不明显。当超过这个界限时效果明显</a:t>
-            </a:r>
-          </a:p>
-        </p:txBody>
-      </p:sp>
-      <p:pic>
-        <p:nvPicPr>
-          <p:cNvPr id="5" name="图片 4">
-            <a:extLst>
-              <a:ext uri="{FF2B5EF4-FFF2-40B4-BE49-F238E27FC236}">
-                <a16:creationId xmlns:a16="http://schemas.microsoft.com/office/drawing/2014/main" id="{5F96F842-200D-EC39-3AFB-234E97B1BCD9}"/>
-              </a:ext>
-            </a:extLst>
-          </p:cNvPr>
-          <p:cNvPicPr>
-            <a:picLocks noChangeAspect="1"/>
-          </p:cNvPicPr>
-          <p:nvPr/>
-        </p:nvPicPr>
-        <p:blipFill>
-          <a:blip r:embed="rId2"/>
-          <a:stretch>
-            <a:fillRect/>
-          </a:stretch>
-        </p:blipFill>
-        <p:spPr>
-          <a:xfrm>
-            <a:off x="6605411" y="2028825"/>
-            <a:ext cx="4445000" cy="3505200"/>
+            <a:off x="2427111" y="2856089"/>
+            <a:ext cx="745067" cy="349955"/>
           </a:xfrm>
           <a:prstGeom prst="rect">
             <a:avLst/>
           </a:prstGeom>
         </p:spPr>
-      </p:pic>
+        <p:style>
+          <a:lnRef idx="2">
+            <a:schemeClr val="accent1">
+              <a:shade val="15000"/>
+            </a:schemeClr>
+          </a:lnRef>
+          <a:fillRef idx="1">
+            <a:schemeClr val="accent1"/>
+          </a:fillRef>
+          <a:effectRef idx="0">
+            <a:schemeClr val="accent1"/>
+          </a:effectRef>
+          <a:fontRef idx="minor">
+            <a:schemeClr val="lt1"/>
+          </a:fontRef>
+        </p:style>
+        <p:txBody>
+          <a:bodyPr rtlCol="0" anchor="ctr"/>
+          <a:lstStyle/>
+          <a:p>
+            <a:pPr algn="ctr"/>
+            <a:r>
+              <a:rPr kumimoji="1" lang="en-US" altLang="zh-CN" dirty="0"/>
+              <a:t>P1</a:t>
+            </a:r>
+            <a:endParaRPr kumimoji="1" lang="zh-CN" altLang="en-US" dirty="0"/>
+          </a:p>
+        </p:txBody>
+      </p:sp>
+      <p:sp>
+        <p:nvSpPr>
+          <p:cNvPr id="5" name="矩形 4">
+            <a:extLst>
+              <a:ext uri="{FF2B5EF4-FFF2-40B4-BE49-F238E27FC236}">
+                <a16:creationId xmlns:a16="http://schemas.microsoft.com/office/drawing/2014/main" id="{7C622DF8-A6EF-762D-2E83-56A3EFFFACF6}"/>
+              </a:ext>
+            </a:extLst>
+          </p:cNvPr>
+          <p:cNvSpPr/>
+          <p:nvPr/>
+        </p:nvSpPr>
+        <p:spPr>
+          <a:xfrm>
+            <a:off x="3172178" y="2856089"/>
+            <a:ext cx="745067" cy="349955"/>
+          </a:xfrm>
+          <a:prstGeom prst="rect">
+            <a:avLst/>
+          </a:prstGeom>
+        </p:spPr>
+        <p:style>
+          <a:lnRef idx="2">
+            <a:schemeClr val="accent1">
+              <a:shade val="15000"/>
+            </a:schemeClr>
+          </a:lnRef>
+          <a:fillRef idx="1">
+            <a:schemeClr val="accent1"/>
+          </a:fillRef>
+          <a:effectRef idx="0">
+            <a:schemeClr val="accent1"/>
+          </a:effectRef>
+          <a:fontRef idx="minor">
+            <a:schemeClr val="lt1"/>
+          </a:fontRef>
+        </p:style>
+        <p:txBody>
+          <a:bodyPr rtlCol="0" anchor="ctr"/>
+          <a:lstStyle/>
+          <a:p>
+            <a:pPr algn="ctr"/>
+            <a:r>
+              <a:rPr kumimoji="1" lang="en-US" altLang="zh-CN" dirty="0"/>
+              <a:t>P2</a:t>
+            </a:r>
+            <a:endParaRPr kumimoji="1" lang="zh-CN" altLang="en-US" dirty="0"/>
+          </a:p>
+        </p:txBody>
+      </p:sp>
+      <p:sp>
+        <p:nvSpPr>
+          <p:cNvPr id="6" name="矩形 5">
+            <a:extLst>
+              <a:ext uri="{FF2B5EF4-FFF2-40B4-BE49-F238E27FC236}">
+                <a16:creationId xmlns:a16="http://schemas.microsoft.com/office/drawing/2014/main" id="{5EF33BD6-177E-17B1-F31A-07A7D4E898C3}"/>
+              </a:ext>
+            </a:extLst>
+          </p:cNvPr>
+          <p:cNvSpPr/>
+          <p:nvPr/>
+        </p:nvSpPr>
+        <p:spPr>
+          <a:xfrm>
+            <a:off x="3917245" y="2856089"/>
+            <a:ext cx="745067" cy="349955"/>
+          </a:xfrm>
+          <a:prstGeom prst="rect">
+            <a:avLst/>
+          </a:prstGeom>
+        </p:spPr>
+        <p:style>
+          <a:lnRef idx="2">
+            <a:schemeClr val="accent1">
+              <a:shade val="15000"/>
+            </a:schemeClr>
+          </a:lnRef>
+          <a:fillRef idx="1">
+            <a:schemeClr val="accent1"/>
+          </a:fillRef>
+          <a:effectRef idx="0">
+            <a:schemeClr val="accent1"/>
+          </a:effectRef>
+          <a:fontRef idx="minor">
+            <a:schemeClr val="lt1"/>
+          </a:fontRef>
+        </p:style>
+        <p:txBody>
+          <a:bodyPr rtlCol="0" anchor="ctr"/>
+          <a:lstStyle/>
+          <a:p>
+            <a:pPr algn="ctr"/>
+            <a:r>
+              <a:rPr kumimoji="1" lang="en-US" altLang="zh-CN" dirty="0"/>
+              <a:t>P3</a:t>
+            </a:r>
+            <a:endParaRPr kumimoji="1" lang="zh-CN" altLang="en-US" dirty="0"/>
+          </a:p>
+        </p:txBody>
+      </p:sp>
+      <p:sp>
+        <p:nvSpPr>
+          <p:cNvPr id="7" name="矩形 6">
+            <a:extLst>
+              <a:ext uri="{FF2B5EF4-FFF2-40B4-BE49-F238E27FC236}">
+                <a16:creationId xmlns:a16="http://schemas.microsoft.com/office/drawing/2014/main" id="{DC60371D-5B42-7B53-E69E-0BE55A5C0EAE}"/>
+              </a:ext>
+            </a:extLst>
+          </p:cNvPr>
+          <p:cNvSpPr/>
+          <p:nvPr/>
+        </p:nvSpPr>
+        <p:spPr>
+          <a:xfrm>
+            <a:off x="4662312" y="2856089"/>
+            <a:ext cx="745067" cy="349955"/>
+          </a:xfrm>
+          <a:prstGeom prst="rect">
+            <a:avLst/>
+          </a:prstGeom>
+          <a:solidFill>
+            <a:schemeClr val="bg1"/>
+          </a:solidFill>
+          <a:ln>
+            <a:solidFill>
+              <a:srgbClr val="FF0000"/>
+            </a:solidFill>
+          </a:ln>
+        </p:spPr>
+        <p:style>
+          <a:lnRef idx="2">
+            <a:schemeClr val="accent1">
+              <a:shade val="15000"/>
+            </a:schemeClr>
+          </a:lnRef>
+          <a:fillRef idx="1">
+            <a:schemeClr val="accent1"/>
+          </a:fillRef>
+          <a:effectRef idx="0">
+            <a:schemeClr val="accent1"/>
+          </a:effectRef>
+          <a:fontRef idx="minor">
+            <a:schemeClr val="lt1"/>
+          </a:fontRef>
+        </p:style>
+        <p:txBody>
+          <a:bodyPr rtlCol="0" anchor="ctr"/>
+          <a:lstStyle/>
+          <a:p>
+            <a:pPr algn="ctr"/>
+            <a:r>
+              <a:rPr kumimoji="1" lang="en-US" altLang="zh-CN" dirty="0">
+                <a:solidFill>
+                  <a:schemeClr val="tx1"/>
+                </a:solidFill>
+              </a:rPr>
+              <a:t>P4</a:t>
+            </a:r>
+            <a:endParaRPr kumimoji="1" lang="zh-CN" altLang="en-US" dirty="0">
+              <a:solidFill>
+                <a:schemeClr val="tx1"/>
+              </a:solidFill>
+            </a:endParaRPr>
+          </a:p>
+        </p:txBody>
+      </p:sp>
+      <p:sp>
+        <p:nvSpPr>
+          <p:cNvPr id="8" name="矩形 7">
+            <a:extLst>
+              <a:ext uri="{FF2B5EF4-FFF2-40B4-BE49-F238E27FC236}">
+                <a16:creationId xmlns:a16="http://schemas.microsoft.com/office/drawing/2014/main" id="{552B0DF9-75EC-7C52-531A-0778903DE71B}"/>
+              </a:ext>
+            </a:extLst>
+          </p:cNvPr>
+          <p:cNvSpPr/>
+          <p:nvPr/>
+        </p:nvSpPr>
+        <p:spPr>
+          <a:xfrm>
+            <a:off x="5407379" y="2856089"/>
+            <a:ext cx="745067" cy="349955"/>
+          </a:xfrm>
+          <a:prstGeom prst="rect">
+            <a:avLst/>
+          </a:prstGeom>
+          <a:solidFill>
+            <a:schemeClr val="bg1"/>
+          </a:solidFill>
+          <a:ln>
+            <a:solidFill>
+              <a:srgbClr val="FF0000"/>
+            </a:solidFill>
+          </a:ln>
+        </p:spPr>
+        <p:style>
+          <a:lnRef idx="2">
+            <a:schemeClr val="accent1">
+              <a:shade val="15000"/>
+            </a:schemeClr>
+          </a:lnRef>
+          <a:fillRef idx="1">
+            <a:schemeClr val="accent1"/>
+          </a:fillRef>
+          <a:effectRef idx="0">
+            <a:schemeClr val="accent1"/>
+          </a:effectRef>
+          <a:fontRef idx="minor">
+            <a:schemeClr val="lt1"/>
+          </a:fontRef>
+        </p:style>
+        <p:txBody>
+          <a:bodyPr rtlCol="0" anchor="ctr"/>
+          <a:lstStyle/>
+          <a:p>
+            <a:pPr algn="ctr"/>
+            <a:r>
+              <a:rPr kumimoji="1" lang="en-US" altLang="zh-CN" dirty="0">
+                <a:solidFill>
+                  <a:schemeClr val="tx1"/>
+                </a:solidFill>
+              </a:rPr>
+              <a:t>P5</a:t>
+            </a:r>
+            <a:endParaRPr kumimoji="1" lang="zh-CN" altLang="en-US" dirty="0">
+              <a:solidFill>
+                <a:schemeClr val="tx1"/>
+              </a:solidFill>
+            </a:endParaRPr>
+          </a:p>
+        </p:txBody>
+      </p:sp>
+      <p:sp>
+        <p:nvSpPr>
+          <p:cNvPr id="9" name="矩形 8">
+            <a:extLst>
+              <a:ext uri="{FF2B5EF4-FFF2-40B4-BE49-F238E27FC236}">
+                <a16:creationId xmlns:a16="http://schemas.microsoft.com/office/drawing/2014/main" id="{4EEFD717-244B-6D0C-609C-AE8A854C30CC}"/>
+              </a:ext>
+            </a:extLst>
+          </p:cNvPr>
+          <p:cNvSpPr/>
+          <p:nvPr/>
+        </p:nvSpPr>
+        <p:spPr>
+          <a:xfrm>
+            <a:off x="6152446" y="2856089"/>
+            <a:ext cx="745067" cy="349955"/>
+          </a:xfrm>
+          <a:prstGeom prst="rect">
+            <a:avLst/>
+          </a:prstGeom>
+          <a:solidFill>
+            <a:schemeClr val="bg1"/>
+          </a:solidFill>
+          <a:ln>
+            <a:solidFill>
+              <a:srgbClr val="FF0000"/>
+            </a:solidFill>
+          </a:ln>
+        </p:spPr>
+        <p:style>
+          <a:lnRef idx="2">
+            <a:schemeClr val="accent1">
+              <a:shade val="15000"/>
+            </a:schemeClr>
+          </a:lnRef>
+          <a:fillRef idx="1">
+            <a:schemeClr val="accent1"/>
+          </a:fillRef>
+          <a:effectRef idx="0">
+            <a:schemeClr val="accent1"/>
+          </a:effectRef>
+          <a:fontRef idx="minor">
+            <a:schemeClr val="lt1"/>
+          </a:fontRef>
+        </p:style>
+        <p:txBody>
+          <a:bodyPr rtlCol="0" anchor="ctr"/>
+          <a:lstStyle/>
+          <a:p>
+            <a:pPr algn="ctr"/>
+            <a:r>
+              <a:rPr kumimoji="1" lang="en-US" altLang="zh-CN" dirty="0">
+                <a:solidFill>
+                  <a:schemeClr val="tx1"/>
+                </a:solidFill>
+              </a:rPr>
+              <a:t>P6</a:t>
+            </a:r>
+            <a:endParaRPr kumimoji="1" lang="zh-CN" altLang="en-US" dirty="0">
+              <a:solidFill>
+                <a:schemeClr val="tx1"/>
+              </a:solidFill>
+            </a:endParaRPr>
+          </a:p>
+        </p:txBody>
+      </p:sp>
+      <p:sp>
+        <p:nvSpPr>
+          <p:cNvPr id="11" name="矩形 10">
+            <a:extLst>
+              <a:ext uri="{FF2B5EF4-FFF2-40B4-BE49-F238E27FC236}">
+                <a16:creationId xmlns:a16="http://schemas.microsoft.com/office/drawing/2014/main" id="{8F7D8ED2-9E18-C2CB-DC29-6055DFAD7D77}"/>
+              </a:ext>
+            </a:extLst>
+          </p:cNvPr>
+          <p:cNvSpPr/>
+          <p:nvPr/>
+        </p:nvSpPr>
+        <p:spPr>
+          <a:xfrm>
+            <a:off x="6897513" y="2856089"/>
+            <a:ext cx="745067" cy="349955"/>
+          </a:xfrm>
+          <a:prstGeom prst="rect">
+            <a:avLst/>
+          </a:prstGeom>
+        </p:spPr>
+        <p:style>
+          <a:lnRef idx="2">
+            <a:schemeClr val="accent1">
+              <a:shade val="15000"/>
+            </a:schemeClr>
+          </a:lnRef>
+          <a:fillRef idx="1">
+            <a:schemeClr val="accent1"/>
+          </a:fillRef>
+          <a:effectRef idx="0">
+            <a:schemeClr val="accent1"/>
+          </a:effectRef>
+          <a:fontRef idx="minor">
+            <a:schemeClr val="lt1"/>
+          </a:fontRef>
+        </p:style>
+        <p:txBody>
+          <a:bodyPr rtlCol="0" anchor="ctr"/>
+          <a:lstStyle/>
+          <a:p>
+            <a:pPr algn="ctr"/>
+            <a:r>
+              <a:rPr kumimoji="1" lang="en-US" altLang="zh-CN" dirty="0"/>
+              <a:t>P7</a:t>
+            </a:r>
+            <a:endParaRPr kumimoji="1" lang="zh-CN" altLang="en-US" dirty="0"/>
+          </a:p>
+        </p:txBody>
+      </p:sp>
+      <p:cxnSp>
+        <p:nvCxnSpPr>
+          <p:cNvPr id="13" name="直线箭头连接符 12">
+            <a:extLst>
+              <a:ext uri="{FF2B5EF4-FFF2-40B4-BE49-F238E27FC236}">
+                <a16:creationId xmlns:a16="http://schemas.microsoft.com/office/drawing/2014/main" id="{E4FE5DF4-AEDE-9949-2C10-1AD491269CC1}"/>
+              </a:ext>
+            </a:extLst>
+          </p:cNvPr>
+          <p:cNvCxnSpPr>
+            <a:cxnSpLocks/>
+          </p:cNvCxnSpPr>
+          <p:nvPr/>
+        </p:nvCxnSpPr>
+        <p:spPr>
+          <a:xfrm>
+            <a:off x="5034845" y="2554514"/>
+            <a:ext cx="1797221" cy="0"/>
+          </a:xfrm>
+          <a:prstGeom prst="straightConnector1">
+            <a:avLst/>
+          </a:prstGeom>
+          <a:ln>
+            <a:tailEnd type="triangle"/>
+          </a:ln>
+        </p:spPr>
+        <p:style>
+          <a:lnRef idx="2">
+            <a:schemeClr val="accent1"/>
+          </a:lnRef>
+          <a:fillRef idx="0">
+            <a:schemeClr val="accent1"/>
+          </a:fillRef>
+          <a:effectRef idx="1">
+            <a:schemeClr val="accent1"/>
+          </a:effectRef>
+          <a:fontRef idx="minor">
+            <a:schemeClr val="tx1"/>
+          </a:fontRef>
+        </p:style>
+      </p:cxnSp>
+      <p:sp>
+        <p:nvSpPr>
+          <p:cNvPr id="14" name="文本框 13">
+            <a:extLst>
+              <a:ext uri="{FF2B5EF4-FFF2-40B4-BE49-F238E27FC236}">
+                <a16:creationId xmlns:a16="http://schemas.microsoft.com/office/drawing/2014/main" id="{CC426F8F-9B04-6D7D-1B21-6573612235D1}"/>
+              </a:ext>
+            </a:extLst>
+          </p:cNvPr>
+          <p:cNvSpPr txBox="1"/>
+          <p:nvPr/>
+        </p:nvSpPr>
+        <p:spPr>
+          <a:xfrm>
+            <a:off x="5023558" y="2185182"/>
+            <a:ext cx="1808508" cy="369332"/>
+          </a:xfrm>
+          <a:prstGeom prst="rect">
+            <a:avLst/>
+          </a:prstGeom>
+          <a:noFill/>
+        </p:spPr>
+        <p:txBody>
+          <a:bodyPr wrap="none" rtlCol="0">
+            <a:spAutoFit/>
+          </a:bodyPr>
+          <a:lstStyle/>
+          <a:p>
+            <a:r>
+              <a:rPr kumimoji="1" lang="en" altLang="zh-CN" dirty="0"/>
+              <a:t>Sliding Direction</a:t>
+            </a:r>
+            <a:endParaRPr kumimoji="1" lang="zh-CN" altLang="en-US" dirty="0"/>
+          </a:p>
+        </p:txBody>
+      </p:sp>
     </p:spTree>
     <p:extLst>
       <p:ext uri="{BB962C8B-B14F-4D97-AF65-F5344CB8AC3E}">
-        <p14:creationId xmlns:p14="http://schemas.microsoft.com/office/powerpoint/2010/main" val="884742854"/>
+        <p14:creationId xmlns:p14="http://schemas.microsoft.com/office/powerpoint/2010/main" val="1620506292"/>
+      </p:ext>
+    </p:extLst>
+  </p:cSld>
+  <p:clrMapOvr>
+    <a:masterClrMapping/>
+  </p:clrMapOvr>
+</p:sld>
+</file>
+
+<file path=ppt/slides/slide3.xml><?xml version="1.0" encoding="utf-8"?>
+<p:sld xmlns:a="http://schemas.openxmlformats.org/drawingml/2006/main" xmlns:r="http://schemas.openxmlformats.org/officeDocument/2006/relationships" xmlns:p="http://schemas.openxmlformats.org/presentationml/2006/main">
+  <p:cSld>
+    <p:spTree>
+      <p:nvGrpSpPr>
+        <p:cNvPr id="1" name="">
+          <a:extLst>
+            <a:ext uri="{FF2B5EF4-FFF2-40B4-BE49-F238E27FC236}">
+              <a16:creationId xmlns:a16="http://schemas.microsoft.com/office/drawing/2014/main" id="{DF8BDABF-CA46-6215-0889-2700E929F73D}"/>
+            </a:ext>
+          </a:extLst>
+        </p:cNvPr>
+        <p:cNvGrpSpPr/>
+        <p:nvPr/>
+      </p:nvGrpSpPr>
+      <p:grpSpPr>
+        <a:xfrm>
+          <a:off x="0" y="0"/>
+          <a:ext cx="0" cy="0"/>
+          <a:chOff x="0" y="0"/>
+          <a:chExt cx="0" cy="0"/>
+        </a:xfrm>
+      </p:grpSpPr>
+      <p:sp>
+        <p:nvSpPr>
+          <p:cNvPr id="2" name="标题 1">
+            <a:extLst>
+              <a:ext uri="{FF2B5EF4-FFF2-40B4-BE49-F238E27FC236}">
+                <a16:creationId xmlns:a16="http://schemas.microsoft.com/office/drawing/2014/main" id="{638C41CB-49AD-B1F5-8388-36D8B5651BF2}"/>
+              </a:ext>
+            </a:extLst>
+          </p:cNvPr>
+          <p:cNvSpPr>
+            <a:spLocks noGrp="1"/>
+          </p:cNvSpPr>
+          <p:nvPr>
+            <p:ph type="title"/>
+          </p:nvPr>
+        </p:nvSpPr>
+        <p:spPr/>
+        <p:txBody>
+          <a:bodyPr/>
+          <a:lstStyle/>
+          <a:p>
+            <a:endParaRPr kumimoji="1" lang="zh-CN" altLang="en-US" dirty="0"/>
+          </a:p>
+        </p:txBody>
+      </p:sp>
+      <p:sp>
+        <p:nvSpPr>
+          <p:cNvPr id="4" name="矩形 3">
+            <a:extLst>
+              <a:ext uri="{FF2B5EF4-FFF2-40B4-BE49-F238E27FC236}">
+                <a16:creationId xmlns:a16="http://schemas.microsoft.com/office/drawing/2014/main" id="{6C94AC86-EA24-744F-C813-0E131B25DAA8}"/>
+              </a:ext>
+            </a:extLst>
+          </p:cNvPr>
+          <p:cNvSpPr/>
+          <p:nvPr/>
+        </p:nvSpPr>
+        <p:spPr>
+          <a:xfrm>
+            <a:off x="2427111" y="2856089"/>
+            <a:ext cx="745067" cy="361046"/>
+          </a:xfrm>
+          <a:prstGeom prst="rect">
+            <a:avLst/>
+          </a:prstGeom>
+        </p:spPr>
+        <p:style>
+          <a:lnRef idx="2">
+            <a:schemeClr val="accent1">
+              <a:shade val="15000"/>
+            </a:schemeClr>
+          </a:lnRef>
+          <a:fillRef idx="1">
+            <a:schemeClr val="accent1"/>
+          </a:fillRef>
+          <a:effectRef idx="0">
+            <a:schemeClr val="accent1"/>
+          </a:effectRef>
+          <a:fontRef idx="minor">
+            <a:schemeClr val="lt1"/>
+          </a:fontRef>
+        </p:style>
+        <p:txBody>
+          <a:bodyPr rtlCol="0" anchor="ctr"/>
+          <a:lstStyle/>
+          <a:p>
+            <a:pPr algn="ctr"/>
+            <a:r>
+              <a:rPr kumimoji="1" lang="en-US" altLang="zh-CN" dirty="0"/>
+              <a:t>F1</a:t>
+            </a:r>
+            <a:endParaRPr kumimoji="1" lang="zh-CN" altLang="en-US" dirty="0"/>
+          </a:p>
+        </p:txBody>
+      </p:sp>
+      <p:sp>
+        <p:nvSpPr>
+          <p:cNvPr id="5" name="矩形 4">
+            <a:extLst>
+              <a:ext uri="{FF2B5EF4-FFF2-40B4-BE49-F238E27FC236}">
+                <a16:creationId xmlns:a16="http://schemas.microsoft.com/office/drawing/2014/main" id="{92ED1BCD-9229-DCB9-CA7C-FA02033539B0}"/>
+              </a:ext>
+            </a:extLst>
+          </p:cNvPr>
+          <p:cNvSpPr/>
+          <p:nvPr/>
+        </p:nvSpPr>
+        <p:spPr>
+          <a:xfrm>
+            <a:off x="3172178" y="2856089"/>
+            <a:ext cx="745067" cy="361046"/>
+          </a:xfrm>
+          <a:prstGeom prst="rect">
+            <a:avLst/>
+          </a:prstGeom>
+        </p:spPr>
+        <p:style>
+          <a:lnRef idx="2">
+            <a:schemeClr val="accent1">
+              <a:shade val="15000"/>
+            </a:schemeClr>
+          </a:lnRef>
+          <a:fillRef idx="1">
+            <a:schemeClr val="accent1"/>
+          </a:fillRef>
+          <a:effectRef idx="0">
+            <a:schemeClr val="accent1"/>
+          </a:effectRef>
+          <a:fontRef idx="minor">
+            <a:schemeClr val="lt1"/>
+          </a:fontRef>
+        </p:style>
+        <p:txBody>
+          <a:bodyPr rtlCol="0" anchor="ctr"/>
+          <a:lstStyle/>
+          <a:p>
+            <a:pPr algn="ctr"/>
+            <a:r>
+              <a:rPr kumimoji="1" lang="en-US" altLang="zh-CN" dirty="0"/>
+              <a:t>F2</a:t>
+            </a:r>
+            <a:endParaRPr kumimoji="1" lang="zh-CN" altLang="en-US" dirty="0"/>
+          </a:p>
+        </p:txBody>
+      </p:sp>
+      <p:sp>
+        <p:nvSpPr>
+          <p:cNvPr id="6" name="矩形 5">
+            <a:extLst>
+              <a:ext uri="{FF2B5EF4-FFF2-40B4-BE49-F238E27FC236}">
+                <a16:creationId xmlns:a16="http://schemas.microsoft.com/office/drawing/2014/main" id="{32B7004F-AB73-CD98-3220-4F8DC15E44E5}"/>
+              </a:ext>
+            </a:extLst>
+          </p:cNvPr>
+          <p:cNvSpPr/>
+          <p:nvPr/>
+        </p:nvSpPr>
+        <p:spPr>
+          <a:xfrm>
+            <a:off x="3917245" y="2856089"/>
+            <a:ext cx="745067" cy="361046"/>
+          </a:xfrm>
+          <a:prstGeom prst="rect">
+            <a:avLst/>
+          </a:prstGeom>
+          <a:solidFill>
+            <a:schemeClr val="bg1"/>
+          </a:solidFill>
+          <a:ln>
+            <a:solidFill>
+              <a:srgbClr val="FF0000"/>
+            </a:solidFill>
+          </a:ln>
+        </p:spPr>
+        <p:style>
+          <a:lnRef idx="2">
+            <a:schemeClr val="accent1">
+              <a:shade val="15000"/>
+            </a:schemeClr>
+          </a:lnRef>
+          <a:fillRef idx="1">
+            <a:schemeClr val="accent1"/>
+          </a:fillRef>
+          <a:effectRef idx="0">
+            <a:schemeClr val="accent1"/>
+          </a:effectRef>
+          <a:fontRef idx="minor">
+            <a:schemeClr val="lt1"/>
+          </a:fontRef>
+        </p:style>
+        <p:txBody>
+          <a:bodyPr rtlCol="0" anchor="ctr"/>
+          <a:lstStyle/>
+          <a:p>
+            <a:pPr algn="ctr"/>
+            <a:r>
+              <a:rPr kumimoji="1" lang="en-US" altLang="zh-CN" dirty="0">
+                <a:solidFill>
+                  <a:schemeClr val="tx1"/>
+                </a:solidFill>
+              </a:rPr>
+              <a:t>F3</a:t>
+            </a:r>
+            <a:endParaRPr kumimoji="1" lang="zh-CN" altLang="en-US" dirty="0">
+              <a:solidFill>
+                <a:schemeClr val="tx1"/>
+              </a:solidFill>
+            </a:endParaRPr>
+          </a:p>
+        </p:txBody>
+      </p:sp>
+      <p:sp>
+        <p:nvSpPr>
+          <p:cNvPr id="11" name="矩形 10">
+            <a:extLst>
+              <a:ext uri="{FF2B5EF4-FFF2-40B4-BE49-F238E27FC236}">
+                <a16:creationId xmlns:a16="http://schemas.microsoft.com/office/drawing/2014/main" id="{0D83F30D-0FA7-9D04-D32E-E0F1A9C4BEB1}"/>
+              </a:ext>
+            </a:extLst>
+          </p:cNvPr>
+          <p:cNvSpPr/>
+          <p:nvPr/>
+        </p:nvSpPr>
+        <p:spPr>
+          <a:xfrm>
+            <a:off x="4676824" y="2856088"/>
+            <a:ext cx="745067" cy="361047"/>
+          </a:xfrm>
+          <a:prstGeom prst="rect">
+            <a:avLst/>
+          </a:prstGeom>
+        </p:spPr>
+        <p:style>
+          <a:lnRef idx="2">
+            <a:schemeClr val="accent1">
+              <a:shade val="15000"/>
+            </a:schemeClr>
+          </a:lnRef>
+          <a:fillRef idx="1">
+            <a:schemeClr val="accent1"/>
+          </a:fillRef>
+          <a:effectRef idx="0">
+            <a:schemeClr val="accent1"/>
+          </a:effectRef>
+          <a:fontRef idx="minor">
+            <a:schemeClr val="lt1"/>
+          </a:fontRef>
+        </p:style>
+        <p:txBody>
+          <a:bodyPr rtlCol="0" anchor="ctr"/>
+          <a:lstStyle/>
+          <a:p>
+            <a:pPr algn="ctr"/>
+            <a:r>
+              <a:rPr kumimoji="1" lang="en-US" altLang="zh-CN" dirty="0"/>
+              <a:t>F4</a:t>
+            </a:r>
+            <a:endParaRPr kumimoji="1" lang="zh-CN" altLang="en-US" dirty="0"/>
+          </a:p>
+        </p:txBody>
+      </p:sp>
+      <p:sp>
+        <p:nvSpPr>
+          <p:cNvPr id="12" name="矩形 11">
+            <a:extLst>
+              <a:ext uri="{FF2B5EF4-FFF2-40B4-BE49-F238E27FC236}">
+                <a16:creationId xmlns:a16="http://schemas.microsoft.com/office/drawing/2014/main" id="{057CA99E-7209-A2F7-CADA-8BE6D196C77F}"/>
+              </a:ext>
+            </a:extLst>
+          </p:cNvPr>
+          <p:cNvSpPr/>
+          <p:nvPr/>
+        </p:nvSpPr>
+        <p:spPr>
+          <a:xfrm>
+            <a:off x="5407379" y="2856089"/>
+            <a:ext cx="745067" cy="361046"/>
+          </a:xfrm>
+          <a:prstGeom prst="rect">
+            <a:avLst/>
+          </a:prstGeom>
+        </p:spPr>
+        <p:style>
+          <a:lnRef idx="2">
+            <a:schemeClr val="accent1">
+              <a:shade val="15000"/>
+            </a:schemeClr>
+          </a:lnRef>
+          <a:fillRef idx="1">
+            <a:schemeClr val="accent1"/>
+          </a:fillRef>
+          <a:effectRef idx="0">
+            <a:schemeClr val="accent1"/>
+          </a:effectRef>
+          <a:fontRef idx="minor">
+            <a:schemeClr val="lt1"/>
+          </a:fontRef>
+        </p:style>
+        <p:txBody>
+          <a:bodyPr rtlCol="0" anchor="ctr"/>
+          <a:lstStyle/>
+          <a:p>
+            <a:pPr algn="ctr"/>
+            <a:r>
+              <a:rPr kumimoji="1" lang="en-US" altLang="zh-CN" dirty="0"/>
+              <a:t>F5</a:t>
+            </a:r>
+            <a:endParaRPr kumimoji="1" lang="zh-CN" altLang="en-US" dirty="0"/>
+          </a:p>
+        </p:txBody>
+      </p:sp>
+      <p:sp>
+        <p:nvSpPr>
+          <p:cNvPr id="15" name="矩形 14">
+            <a:extLst>
+              <a:ext uri="{FF2B5EF4-FFF2-40B4-BE49-F238E27FC236}">
+                <a16:creationId xmlns:a16="http://schemas.microsoft.com/office/drawing/2014/main" id="{2821135C-BD6E-B59D-7055-0000E403917A}"/>
+              </a:ext>
+            </a:extLst>
+          </p:cNvPr>
+          <p:cNvSpPr/>
+          <p:nvPr/>
+        </p:nvSpPr>
+        <p:spPr>
+          <a:xfrm>
+            <a:off x="6152446" y="2856088"/>
+            <a:ext cx="745067" cy="361243"/>
+          </a:xfrm>
+          <a:prstGeom prst="rect">
+            <a:avLst/>
+          </a:prstGeom>
+          <a:solidFill>
+            <a:schemeClr val="bg1"/>
+          </a:solidFill>
+          <a:ln>
+            <a:solidFill>
+              <a:srgbClr val="FF0000"/>
+            </a:solidFill>
+          </a:ln>
+        </p:spPr>
+        <p:style>
+          <a:lnRef idx="2">
+            <a:schemeClr val="accent1">
+              <a:shade val="15000"/>
+            </a:schemeClr>
+          </a:lnRef>
+          <a:fillRef idx="1">
+            <a:schemeClr val="accent1"/>
+          </a:fillRef>
+          <a:effectRef idx="0">
+            <a:schemeClr val="accent1"/>
+          </a:effectRef>
+          <a:fontRef idx="minor">
+            <a:schemeClr val="lt1"/>
+          </a:fontRef>
+        </p:style>
+        <p:txBody>
+          <a:bodyPr rtlCol="0" anchor="ctr"/>
+          <a:lstStyle/>
+          <a:p>
+            <a:pPr algn="ctr"/>
+            <a:r>
+              <a:rPr kumimoji="1" lang="en-US" altLang="zh-CN" dirty="0">
+                <a:solidFill>
+                  <a:schemeClr val="tx1"/>
+                </a:solidFill>
+              </a:rPr>
+              <a:t>F6</a:t>
+            </a:r>
+            <a:endParaRPr kumimoji="1" lang="zh-CN" altLang="en-US" dirty="0">
+              <a:solidFill>
+                <a:schemeClr val="tx1"/>
+              </a:solidFill>
+            </a:endParaRPr>
+          </a:p>
+        </p:txBody>
+      </p:sp>
+      <p:sp>
+        <p:nvSpPr>
+          <p:cNvPr id="16" name="矩形 15">
+            <a:extLst>
+              <a:ext uri="{FF2B5EF4-FFF2-40B4-BE49-F238E27FC236}">
+                <a16:creationId xmlns:a16="http://schemas.microsoft.com/office/drawing/2014/main" id="{80C4C94F-CE4C-B513-263D-DB2C776077A9}"/>
+              </a:ext>
+            </a:extLst>
+          </p:cNvPr>
+          <p:cNvSpPr/>
+          <p:nvPr/>
+        </p:nvSpPr>
+        <p:spPr>
+          <a:xfrm>
+            <a:off x="6897513" y="2856088"/>
+            <a:ext cx="745067" cy="361047"/>
+          </a:xfrm>
+          <a:prstGeom prst="rect">
+            <a:avLst/>
+          </a:prstGeom>
+        </p:spPr>
+        <p:style>
+          <a:lnRef idx="2">
+            <a:schemeClr val="accent1">
+              <a:shade val="15000"/>
+            </a:schemeClr>
+          </a:lnRef>
+          <a:fillRef idx="1">
+            <a:schemeClr val="accent1"/>
+          </a:fillRef>
+          <a:effectRef idx="0">
+            <a:schemeClr val="accent1"/>
+          </a:effectRef>
+          <a:fontRef idx="minor">
+            <a:schemeClr val="lt1"/>
+          </a:fontRef>
+        </p:style>
+        <p:txBody>
+          <a:bodyPr rtlCol="0" anchor="ctr"/>
+          <a:lstStyle/>
+          <a:p>
+            <a:pPr algn="ctr"/>
+            <a:r>
+              <a:rPr kumimoji="1" lang="en-US" altLang="zh-CN" dirty="0"/>
+              <a:t>F7</a:t>
+            </a:r>
+            <a:endParaRPr kumimoji="1" lang="zh-CN" altLang="en-US" dirty="0"/>
+          </a:p>
+        </p:txBody>
+      </p:sp>
+      <p:sp>
+        <p:nvSpPr>
+          <p:cNvPr id="17" name="矩形 16">
+            <a:extLst>
+              <a:ext uri="{FF2B5EF4-FFF2-40B4-BE49-F238E27FC236}">
+                <a16:creationId xmlns:a16="http://schemas.microsoft.com/office/drawing/2014/main" id="{04F6BFF2-9418-CB78-C411-07B3BF136398}"/>
+              </a:ext>
+            </a:extLst>
+          </p:cNvPr>
+          <p:cNvSpPr/>
+          <p:nvPr/>
+        </p:nvSpPr>
+        <p:spPr>
+          <a:xfrm>
+            <a:off x="7642580" y="2856088"/>
+            <a:ext cx="745067" cy="361047"/>
+          </a:xfrm>
+          <a:prstGeom prst="rect">
+            <a:avLst/>
+          </a:prstGeom>
+        </p:spPr>
+        <p:style>
+          <a:lnRef idx="2">
+            <a:schemeClr val="accent1">
+              <a:shade val="15000"/>
+            </a:schemeClr>
+          </a:lnRef>
+          <a:fillRef idx="1">
+            <a:schemeClr val="accent1"/>
+          </a:fillRef>
+          <a:effectRef idx="0">
+            <a:schemeClr val="accent1"/>
+          </a:effectRef>
+          <a:fontRef idx="minor">
+            <a:schemeClr val="lt1"/>
+          </a:fontRef>
+        </p:style>
+        <p:txBody>
+          <a:bodyPr rtlCol="0" anchor="ctr"/>
+          <a:lstStyle/>
+          <a:p>
+            <a:pPr algn="ctr"/>
+            <a:r>
+              <a:rPr kumimoji="1" lang="en-US" altLang="zh-CN" dirty="0"/>
+              <a:t>F8</a:t>
+            </a:r>
+            <a:endParaRPr kumimoji="1" lang="zh-CN" altLang="en-US" dirty="0"/>
+          </a:p>
+        </p:txBody>
+      </p:sp>
+      <p:sp>
+        <p:nvSpPr>
+          <p:cNvPr id="18" name="右大括号 17">
+            <a:extLst>
+              <a:ext uri="{FF2B5EF4-FFF2-40B4-BE49-F238E27FC236}">
+                <a16:creationId xmlns:a16="http://schemas.microsoft.com/office/drawing/2014/main" id="{027BB7D3-938E-8DCD-5C00-7BEB30EC0E70}"/>
+              </a:ext>
+            </a:extLst>
+          </p:cNvPr>
+          <p:cNvSpPr/>
+          <p:nvPr/>
+        </p:nvSpPr>
+        <p:spPr>
+          <a:xfrm rot="5400000">
+            <a:off x="3358445" y="2497666"/>
+            <a:ext cx="1117600" cy="2980268"/>
+          </a:xfrm>
+          <a:prstGeom prst="rightBrace">
+            <a:avLst/>
+          </a:prstGeom>
+        </p:spPr>
+        <p:style>
+          <a:lnRef idx="2">
+            <a:schemeClr val="accent1"/>
+          </a:lnRef>
+          <a:fillRef idx="0">
+            <a:schemeClr val="accent1"/>
+          </a:fillRef>
+          <a:effectRef idx="1">
+            <a:schemeClr val="accent1"/>
+          </a:effectRef>
+          <a:fontRef idx="minor">
+            <a:schemeClr val="tx1"/>
+          </a:fontRef>
+        </p:style>
+        <p:txBody>
+          <a:bodyPr rtlCol="0" anchor="ctr"/>
+          <a:lstStyle/>
+          <a:p>
+            <a:pPr algn="ctr"/>
+            <a:endParaRPr kumimoji="1" lang="zh-CN" altLang="en-US"/>
+          </a:p>
+        </p:txBody>
+      </p:sp>
+      <p:sp>
+        <p:nvSpPr>
+          <p:cNvPr id="19" name="右大括号 18">
+            <a:extLst>
+              <a:ext uri="{FF2B5EF4-FFF2-40B4-BE49-F238E27FC236}">
+                <a16:creationId xmlns:a16="http://schemas.microsoft.com/office/drawing/2014/main" id="{6DB2D986-ADCC-89B4-5A22-276F187318A0}"/>
+              </a:ext>
+            </a:extLst>
+          </p:cNvPr>
+          <p:cNvSpPr/>
+          <p:nvPr/>
+        </p:nvSpPr>
+        <p:spPr>
+          <a:xfrm rot="5400000">
+            <a:off x="6338713" y="2497664"/>
+            <a:ext cx="1117600" cy="2980268"/>
+          </a:xfrm>
+          <a:prstGeom prst="rightBrace">
+            <a:avLst/>
+          </a:prstGeom>
+        </p:spPr>
+        <p:style>
+          <a:lnRef idx="2">
+            <a:schemeClr val="accent1"/>
+          </a:lnRef>
+          <a:fillRef idx="0">
+            <a:schemeClr val="accent1"/>
+          </a:fillRef>
+          <a:effectRef idx="1">
+            <a:schemeClr val="accent1"/>
+          </a:effectRef>
+          <a:fontRef idx="minor">
+            <a:schemeClr val="tx1"/>
+          </a:fontRef>
+        </p:style>
+        <p:txBody>
+          <a:bodyPr rtlCol="0" anchor="ctr"/>
+          <a:lstStyle/>
+          <a:p>
+            <a:pPr algn="ctr"/>
+            <a:endParaRPr kumimoji="1" lang="zh-CN" altLang="en-US"/>
+          </a:p>
+        </p:txBody>
+      </p:sp>
+      <p:sp>
+        <p:nvSpPr>
+          <p:cNvPr id="20" name="文本框 19">
+            <a:extLst>
+              <a:ext uri="{FF2B5EF4-FFF2-40B4-BE49-F238E27FC236}">
+                <a16:creationId xmlns:a16="http://schemas.microsoft.com/office/drawing/2014/main" id="{185F335A-8B49-8AA6-E0BB-7EE2861700E5}"/>
+              </a:ext>
+            </a:extLst>
+          </p:cNvPr>
+          <p:cNvSpPr txBox="1"/>
+          <p:nvPr/>
+        </p:nvSpPr>
+        <p:spPr>
+          <a:xfrm>
+            <a:off x="2799644" y="4584889"/>
+            <a:ext cx="2249714" cy="369332"/>
+          </a:xfrm>
+          <a:prstGeom prst="rect">
+            <a:avLst/>
+          </a:prstGeom>
+          <a:noFill/>
+        </p:spPr>
+        <p:txBody>
+          <a:bodyPr wrap="square" rtlCol="0">
+            <a:spAutoFit/>
+          </a:bodyPr>
+          <a:lstStyle/>
+          <a:p>
+            <a:pPr algn="ctr"/>
+            <a:r>
+              <a:rPr kumimoji="1" lang="en-US" altLang="zh-CN" dirty="0"/>
+              <a:t>More Redundancy</a:t>
+            </a:r>
+            <a:r>
+              <a:rPr kumimoji="1" lang="zh-CN" altLang="en-US" dirty="0"/>
+              <a:t> </a:t>
+            </a:r>
+          </a:p>
+        </p:txBody>
+      </p:sp>
+      <p:sp>
+        <p:nvSpPr>
+          <p:cNvPr id="21" name="文本框 20">
+            <a:extLst>
+              <a:ext uri="{FF2B5EF4-FFF2-40B4-BE49-F238E27FC236}">
+                <a16:creationId xmlns:a16="http://schemas.microsoft.com/office/drawing/2014/main" id="{37982998-FCD3-4688-200A-8A462AF7B5C4}"/>
+              </a:ext>
+            </a:extLst>
+          </p:cNvPr>
+          <p:cNvSpPr txBox="1"/>
+          <p:nvPr/>
+        </p:nvSpPr>
+        <p:spPr>
+          <a:xfrm>
+            <a:off x="5765399" y="4597778"/>
+            <a:ext cx="2249714" cy="369332"/>
+          </a:xfrm>
+          <a:prstGeom prst="rect">
+            <a:avLst/>
+          </a:prstGeom>
+          <a:noFill/>
+        </p:spPr>
+        <p:txBody>
+          <a:bodyPr wrap="square" rtlCol="0">
+            <a:spAutoFit/>
+          </a:bodyPr>
+          <a:lstStyle/>
+          <a:p>
+            <a:pPr algn="ctr"/>
+            <a:r>
+              <a:rPr kumimoji="1" lang="en-US" altLang="zh-CN" dirty="0"/>
+              <a:t>Less Redundancy</a:t>
+            </a:r>
+            <a:r>
+              <a:rPr kumimoji="1" lang="zh-CN" altLang="en-US" dirty="0"/>
+              <a:t> </a:t>
+            </a:r>
+          </a:p>
+        </p:txBody>
+      </p:sp>
+      <p:cxnSp>
+        <p:nvCxnSpPr>
+          <p:cNvPr id="23" name="直线箭头连接符 22">
+            <a:extLst>
+              <a:ext uri="{FF2B5EF4-FFF2-40B4-BE49-F238E27FC236}">
+                <a16:creationId xmlns:a16="http://schemas.microsoft.com/office/drawing/2014/main" id="{0AE2252B-0B2A-9F4F-4ADC-468A4C917805}"/>
+              </a:ext>
+            </a:extLst>
+          </p:cNvPr>
+          <p:cNvCxnSpPr>
+            <a:cxnSpLocks/>
+          </p:cNvCxnSpPr>
+          <p:nvPr/>
+        </p:nvCxnSpPr>
+        <p:spPr>
+          <a:xfrm>
+            <a:off x="8144935" y="3107069"/>
+            <a:ext cx="874889" cy="765020"/>
+          </a:xfrm>
+          <a:prstGeom prst="straightConnector1">
+            <a:avLst/>
+          </a:prstGeom>
+          <a:ln>
+            <a:tailEnd type="triangle"/>
+          </a:ln>
+        </p:spPr>
+        <p:style>
+          <a:lnRef idx="2">
+            <a:schemeClr val="accent1"/>
+          </a:lnRef>
+          <a:fillRef idx="0">
+            <a:schemeClr val="accent1"/>
+          </a:fillRef>
+          <a:effectRef idx="1">
+            <a:schemeClr val="accent1"/>
+          </a:effectRef>
+          <a:fontRef idx="minor">
+            <a:schemeClr val="tx1"/>
+          </a:fontRef>
+        </p:style>
+      </p:cxnSp>
+      <p:sp>
+        <p:nvSpPr>
+          <p:cNvPr id="26" name="矩形 25">
+            <a:extLst>
+              <a:ext uri="{FF2B5EF4-FFF2-40B4-BE49-F238E27FC236}">
+                <a16:creationId xmlns:a16="http://schemas.microsoft.com/office/drawing/2014/main" id="{00622782-5263-0B62-6435-66D4DD59A8C3}"/>
+              </a:ext>
+            </a:extLst>
+          </p:cNvPr>
+          <p:cNvSpPr/>
+          <p:nvPr/>
+        </p:nvSpPr>
+        <p:spPr>
+          <a:xfrm>
+            <a:off x="9019824" y="3987798"/>
+            <a:ext cx="304798" cy="301980"/>
+          </a:xfrm>
+          <a:prstGeom prst="rect">
+            <a:avLst/>
+          </a:prstGeom>
+          <a:solidFill>
+            <a:srgbClr val="FF0000"/>
+          </a:solidFill>
+        </p:spPr>
+        <p:style>
+          <a:lnRef idx="2">
+            <a:schemeClr val="accent1">
+              <a:shade val="15000"/>
+            </a:schemeClr>
+          </a:lnRef>
+          <a:fillRef idx="1">
+            <a:schemeClr val="accent1"/>
+          </a:fillRef>
+          <a:effectRef idx="0">
+            <a:schemeClr val="accent1"/>
+          </a:effectRef>
+          <a:fontRef idx="minor">
+            <a:schemeClr val="lt1"/>
+          </a:fontRef>
+        </p:style>
+        <p:txBody>
+          <a:bodyPr rtlCol="0" anchor="ctr"/>
+          <a:lstStyle/>
+          <a:p>
+            <a:pPr algn="ctr"/>
+            <a:endParaRPr kumimoji="1" lang="zh-CN" altLang="en-US"/>
+          </a:p>
+        </p:txBody>
+      </p:sp>
+      <p:sp>
+        <p:nvSpPr>
+          <p:cNvPr id="27" name="矩形 26">
+            <a:extLst>
+              <a:ext uri="{FF2B5EF4-FFF2-40B4-BE49-F238E27FC236}">
+                <a16:creationId xmlns:a16="http://schemas.microsoft.com/office/drawing/2014/main" id="{86CEEAF7-FA08-A122-B7AD-16A0D2DB0834}"/>
+              </a:ext>
+            </a:extLst>
+          </p:cNvPr>
+          <p:cNvSpPr/>
+          <p:nvPr/>
+        </p:nvSpPr>
+        <p:spPr>
+          <a:xfrm>
+            <a:off x="9335911" y="3987798"/>
+            <a:ext cx="304798" cy="301980"/>
+          </a:xfrm>
+          <a:prstGeom prst="rect">
+            <a:avLst/>
+          </a:prstGeom>
+        </p:spPr>
+        <p:style>
+          <a:lnRef idx="2">
+            <a:schemeClr val="accent1">
+              <a:shade val="15000"/>
+            </a:schemeClr>
+          </a:lnRef>
+          <a:fillRef idx="1">
+            <a:schemeClr val="accent1"/>
+          </a:fillRef>
+          <a:effectRef idx="0">
+            <a:schemeClr val="accent1"/>
+          </a:effectRef>
+          <a:fontRef idx="minor">
+            <a:schemeClr val="lt1"/>
+          </a:fontRef>
+        </p:style>
+        <p:txBody>
+          <a:bodyPr rtlCol="0" anchor="ctr"/>
+          <a:lstStyle/>
+          <a:p>
+            <a:pPr algn="ctr"/>
+            <a:endParaRPr kumimoji="1" lang="zh-CN" altLang="en-US"/>
+          </a:p>
+        </p:txBody>
+      </p:sp>
+      <p:cxnSp>
+        <p:nvCxnSpPr>
+          <p:cNvPr id="29" name="直线箭头连接符 28">
+            <a:extLst>
+              <a:ext uri="{FF2B5EF4-FFF2-40B4-BE49-F238E27FC236}">
+                <a16:creationId xmlns:a16="http://schemas.microsoft.com/office/drawing/2014/main" id="{2EDC1F78-88D6-7674-C506-F9803DD81F12}"/>
+              </a:ext>
+            </a:extLst>
+          </p:cNvPr>
+          <p:cNvCxnSpPr/>
+          <p:nvPr/>
+        </p:nvCxnSpPr>
+        <p:spPr>
+          <a:xfrm flipV="1">
+            <a:off x="8816622" y="4289778"/>
+            <a:ext cx="203202" cy="256820"/>
+          </a:xfrm>
+          <a:prstGeom prst="straightConnector1">
+            <a:avLst/>
+          </a:prstGeom>
+          <a:ln>
+            <a:tailEnd type="triangle"/>
+          </a:ln>
+        </p:spPr>
+        <p:style>
+          <a:lnRef idx="2">
+            <a:schemeClr val="accent1"/>
+          </a:lnRef>
+          <a:fillRef idx="0">
+            <a:schemeClr val="accent1"/>
+          </a:fillRef>
+          <a:effectRef idx="1">
+            <a:schemeClr val="accent1"/>
+          </a:effectRef>
+          <a:fontRef idx="minor">
+            <a:schemeClr val="tx1"/>
+          </a:fontRef>
+        </p:style>
+      </p:cxnSp>
+      <p:cxnSp>
+        <p:nvCxnSpPr>
+          <p:cNvPr id="30" name="直线箭头连接符 29">
+            <a:extLst>
+              <a:ext uri="{FF2B5EF4-FFF2-40B4-BE49-F238E27FC236}">
+                <a16:creationId xmlns:a16="http://schemas.microsoft.com/office/drawing/2014/main" id="{57E8D32A-530F-0433-58AD-B6D6642F1061}"/>
+              </a:ext>
+            </a:extLst>
+          </p:cNvPr>
+          <p:cNvCxnSpPr>
+            <a:cxnSpLocks/>
+          </p:cNvCxnSpPr>
+          <p:nvPr/>
+        </p:nvCxnSpPr>
+        <p:spPr>
+          <a:xfrm flipH="1" flipV="1">
+            <a:off x="9640709" y="4289778"/>
+            <a:ext cx="225780" cy="256820"/>
+          </a:xfrm>
+          <a:prstGeom prst="straightConnector1">
+            <a:avLst/>
+          </a:prstGeom>
+          <a:ln>
+            <a:tailEnd type="triangle"/>
+          </a:ln>
+        </p:spPr>
+        <p:style>
+          <a:lnRef idx="2">
+            <a:schemeClr val="accent1"/>
+          </a:lnRef>
+          <a:fillRef idx="0">
+            <a:schemeClr val="accent1"/>
+          </a:fillRef>
+          <a:effectRef idx="1">
+            <a:schemeClr val="accent1"/>
+          </a:effectRef>
+          <a:fontRef idx="minor">
+            <a:schemeClr val="tx1"/>
+          </a:fontRef>
+        </p:style>
+      </p:cxnSp>
+      <p:sp>
+        <p:nvSpPr>
+          <p:cNvPr id="34" name="文本框 33">
+            <a:extLst>
+              <a:ext uri="{FF2B5EF4-FFF2-40B4-BE49-F238E27FC236}">
+                <a16:creationId xmlns:a16="http://schemas.microsoft.com/office/drawing/2014/main" id="{F99A8468-4467-0D29-9FE8-E2BD4025EDDF}"/>
+              </a:ext>
+            </a:extLst>
+          </p:cNvPr>
+          <p:cNvSpPr txBox="1"/>
+          <p:nvPr/>
+        </p:nvSpPr>
+        <p:spPr>
+          <a:xfrm>
+            <a:off x="8387647" y="4575245"/>
+            <a:ext cx="874889" cy="261610"/>
+          </a:xfrm>
+          <a:prstGeom prst="rect">
+            <a:avLst/>
+          </a:prstGeom>
+          <a:noFill/>
+        </p:spPr>
+        <p:txBody>
+          <a:bodyPr wrap="square" rtlCol="0">
+            <a:spAutoFit/>
+          </a:bodyPr>
+          <a:lstStyle/>
+          <a:p>
+            <a:pPr algn="ctr"/>
+            <a:r>
+              <a:rPr kumimoji="1" lang="en" altLang="zh-CN" sz="1100" dirty="0"/>
+              <a:t>To protect</a:t>
+            </a:r>
+            <a:endParaRPr kumimoji="1" lang="zh-CN" altLang="en-US" sz="1100" dirty="0"/>
+          </a:p>
+        </p:txBody>
+      </p:sp>
+      <p:sp>
+        <p:nvSpPr>
+          <p:cNvPr id="35" name="文本框 34">
+            <a:extLst>
+              <a:ext uri="{FF2B5EF4-FFF2-40B4-BE49-F238E27FC236}">
+                <a16:creationId xmlns:a16="http://schemas.microsoft.com/office/drawing/2014/main" id="{565E8FDB-7D8F-793D-1198-3B3E68D62FC7}"/>
+              </a:ext>
+            </a:extLst>
+          </p:cNvPr>
+          <p:cNvSpPr txBox="1"/>
+          <p:nvPr/>
+        </p:nvSpPr>
+        <p:spPr>
+          <a:xfrm>
+            <a:off x="9488310" y="4575245"/>
+            <a:ext cx="1100663" cy="261610"/>
+          </a:xfrm>
+          <a:prstGeom prst="rect">
+            <a:avLst/>
+          </a:prstGeom>
+          <a:noFill/>
+        </p:spPr>
+        <p:txBody>
+          <a:bodyPr wrap="square" rtlCol="0">
+            <a:spAutoFit/>
+          </a:bodyPr>
+          <a:lstStyle/>
+          <a:p>
+            <a:pPr algn="ctr"/>
+            <a:r>
+              <a:rPr kumimoji="1" lang="en" altLang="zh-CN" sz="1100" dirty="0"/>
+              <a:t>Not to protect</a:t>
+            </a:r>
+            <a:endParaRPr kumimoji="1" lang="zh-CN" altLang="en-US" sz="1100" dirty="0"/>
+          </a:p>
+        </p:txBody>
+      </p:sp>
+    </p:spTree>
+    <p:extLst>
+      <p:ext uri="{BB962C8B-B14F-4D97-AF65-F5344CB8AC3E}">
+        <p14:creationId xmlns:p14="http://schemas.microsoft.com/office/powerpoint/2010/main" val="1161193067"/>
       </p:ext>
     </p:extLst>
   </p:cSld>
